--- a/Презентация_Дисперсия_Волков_Евгений.pptx
+++ b/Презентация_Дисперсия_Волков_Евгений.pptx
@@ -22,6 +22,18 @@
     <p:sldId id="270" r:id="rId21"/>
     <p:sldId id="271" r:id="rId22"/>
     <p:sldId id="272" r:id="rId23"/>
+    <p:sldId id="273" r:id="rId24"/>
+    <p:sldId id="274" r:id="rId25"/>
+    <p:sldId id="275" r:id="rId26"/>
+    <p:sldId id="276" r:id="rId27"/>
+    <p:sldId id="277" r:id="rId28"/>
+    <p:sldId id="278" r:id="rId29"/>
+    <p:sldId id="279" r:id="rId30"/>
+    <p:sldId id="280" r:id="rId31"/>
+    <p:sldId id="281" r:id="rId32"/>
+    <p:sldId id="282" r:id="rId33"/>
+    <p:sldId id="283" r:id="rId34"/>
+    <p:sldId id="284" r:id="rId35"/>
   </p:sldIdLst>
   <p:sldSz cx="12191695" cy="6858000" type="screen4x3"/>
   <p:notesSz cx="6858000" cy="9144000"/>
@@ -4417,6 +4429,635 @@
 </p:sld>
 </file>
 
+<file path=ppt/slides/slide18.xml><?xml version="1.0" encoding="utf-8"?>
+<p:sld xmlns:a="http://schemas.openxmlformats.org/drawingml/2006/main" xmlns:p="http://schemas.openxmlformats.org/presentationml/2006/main" xmlns:r="http://schemas.openxmlformats.org/officeDocument/2006/relationships">
+  <p:cSld>
+    <p:spTree>
+      <p:nvGrpSpPr>
+        <p:cNvPr id="1" name=""/>
+        <p:cNvGrpSpPr/>
+        <p:nvPr/>
+      </p:nvGrpSpPr>
+      <p:grpSpPr/>
+      <p:sp>
+        <p:nvSpPr>
+          <p:cNvPr id="2" name="TextBox 1"/>
+          <p:cNvSpPr txBox="1"/>
+          <p:nvPr/>
+        </p:nvSpPr>
+        <p:spPr>
+          <a:xfrm>
+            <a:off x="457200" y="274320"/>
+            <a:ext cx="8229600" cy="731520"/>
+          </a:xfrm>
+          <a:prstGeom prst="rect">
+            <a:avLst/>
+          </a:prstGeom>
+          <a:noFill/>
+        </p:spPr>
+        <p:txBody>
+          <a:bodyPr wrap="none">
+            <a:spAutoFit/>
+          </a:bodyPr>
+          <a:lstStyle/>
+          <a:p>
+            <a:pPr>
+              <a:defRPr sz="2800" b="1">
+                <a:solidFill>
+                  <a:srgbClr val="003366"/>
+                </a:solidFill>
+              </a:defRPr>
+            </a:pPr>
+            <a:r>
+              <a:t>2.2. Точные технические характеристики НА «Дисперсия»</a:t>
+            </a:r>
+          </a:p>
+        </p:txBody>
+      </p:sp>
+      <p:sp>
+        <p:nvSpPr>
+          <p:cNvPr id="3" name="TextBox 2"/>
+          <p:cNvSpPr txBox="1"/>
+          <p:nvPr/>
+        </p:nvSpPr>
+        <p:spPr>
+          <a:xfrm>
+            <a:off x="457200" y="1097280"/>
+            <a:ext cx="4114800" cy="5029200"/>
+          </a:xfrm>
+          <a:prstGeom prst="rect">
+            <a:avLst/>
+          </a:prstGeom>
+          <a:noFill/>
+        </p:spPr>
+        <p:txBody>
+          <a:bodyPr wrap="square">
+            <a:spAutoFit/>
+          </a:bodyPr>
+          <a:lstStyle/>
+          <a:p>
+            <a:pPr>
+              <a:spcAft>
+                <a:spcPts val="800"/>
+              </a:spcAft>
+              <a:defRPr sz="1600"/>
+            </a:pPr>
+            <a:r>
+              <a:t>Лазеры:</a:t>
+            </a:r>
+          </a:p>
+          <a:p>
+            <a:pPr>
+              <a:spcAft>
+                <a:spcPts val="800"/>
+              </a:spcAft>
+              <a:defRPr sz="1600"/>
+            </a:pPr>
+            <a:r>
+              <a:t>• FPLS-445 нм (2 шт.)</a:t>
+            </a:r>
+          </a:p>
+          <a:p>
+            <a:pPr>
+              <a:spcAft>
+                <a:spcPts val="800"/>
+              </a:spcAft>
+              <a:defRPr sz="1600"/>
+            </a:pPr>
+            <a:r>
+              <a:t>• FPLS-660 нм (1 шт.)</a:t>
+            </a:r>
+          </a:p>
+          <a:p>
+            <a:pPr>
+              <a:spcAft>
+                <a:spcPts val="800"/>
+              </a:spcAft>
+              <a:defRPr sz="1600"/>
+            </a:pPr>
+            <a:r>
+              <a:t>• Одномодовые волокна</a:t>
+            </a:r>
+          </a:p>
+          <a:p>
+            <a:pPr>
+              <a:spcAft>
+                <a:spcPts val="800"/>
+              </a:spcAft>
+              <a:defRPr sz="1600"/>
+            </a:pPr>
+          </a:p>
+          <a:p>
+            <a:pPr>
+              <a:spcAft>
+                <a:spcPts val="800"/>
+              </a:spcAft>
+              <a:defRPr sz="1600"/>
+            </a:pPr>
+            <a:r>
+              <a:t>Видеофиксация:</a:t>
+            </a:r>
+          </a:p>
+          <a:p>
+            <a:pPr>
+              <a:spcAft>
+                <a:spcPts val="800"/>
+              </a:spcAft>
+              <a:defRPr sz="1600"/>
+            </a:pPr>
+            <a:r>
+              <a:t>• Камера BRZ-2351HC-GE</a:t>
+            </a:r>
+          </a:p>
+          <a:p>
+            <a:pPr>
+              <a:spcAft>
+                <a:spcPts val="800"/>
+              </a:spcAft>
+              <a:defRPr sz="1600"/>
+            </a:pPr>
+            <a:r>
+              <a:t>• 1920×1200, 25 к/с</a:t>
+            </a:r>
+          </a:p>
+          <a:p>
+            <a:pPr>
+              <a:spcAft>
+                <a:spcPts val="800"/>
+              </a:spcAft>
+              <a:defRPr sz="1600"/>
+            </a:pPr>
+          </a:p>
+          <a:p>
+            <a:pPr>
+              <a:spcAft>
+                <a:spcPts val="800"/>
+              </a:spcAft>
+              <a:defRPr sz="1600"/>
+            </a:pPr>
+            <a:r>
+              <a:t>Приёмный блок:</a:t>
+            </a:r>
+          </a:p>
+          <a:p>
+            <a:pPr>
+              <a:spcAft>
+                <a:spcPts val="800"/>
+              </a:spcAft>
+              <a:defRPr sz="1600"/>
+            </a:pPr>
+            <a:r>
+              <a:t>• 8 ФПУ BR-2351HM-RS485</a:t>
+            </a:r>
+          </a:p>
+          <a:p>
+            <a:pPr>
+              <a:spcAft>
+                <a:spcPts val="800"/>
+              </a:spcAft>
+              <a:defRPr sz="1600"/>
+            </a:pPr>
+            <a:r>
+              <a:t>• 2 датчика мощности</a:t>
+            </a:r>
+          </a:p>
+          <a:p>
+            <a:pPr>
+              <a:spcAft>
+                <a:spcPts val="800"/>
+              </a:spcAft>
+              <a:defRPr sz="1600"/>
+            </a:pPr>
+          </a:p>
+          <a:p>
+            <a:pPr>
+              <a:spcAft>
+                <a:spcPts val="800"/>
+              </a:spcAft>
+              <a:defRPr sz="1600"/>
+            </a:pPr>
+            <a:r>
+              <a:t>СУСД:</a:t>
+            </a:r>
+          </a:p>
+          <a:p>
+            <a:pPr>
+              <a:spcAft>
+                <a:spcPts val="800"/>
+              </a:spcAft>
+              <a:defRPr sz="1600"/>
+            </a:pPr>
+            <a:r>
+              <a:t>• Двухуровневая архитектура</a:t>
+            </a:r>
+          </a:p>
+          <a:p>
+            <a:pPr>
+              <a:spcAft>
+                <a:spcPts val="800"/>
+              </a:spcAft>
+              <a:defRPr sz="1600"/>
+            </a:pPr>
+            <a:r>
+              <a:t>• Монитор FPM-7061T-R3AE</a:t>
+            </a:r>
+          </a:p>
+          <a:p>
+            <a:pPr>
+              <a:spcAft>
+                <a:spcPts val="800"/>
+              </a:spcAft>
+              <a:defRPr sz="1600"/>
+            </a:pPr>
+            <a:r>
+              <a:t>• ПО 643.САЦН.15900-01</a:t>
+            </a:r>
+          </a:p>
+        </p:txBody>
+      </p:sp>
+      <p:sp>
+        <p:nvSpPr>
+          <p:cNvPr id="4" name="TextBox 3"/>
+          <p:cNvSpPr txBox="1"/>
+          <p:nvPr/>
+        </p:nvSpPr>
+        <p:spPr>
+          <a:xfrm>
+            <a:off x="4754880" y="1097280"/>
+            <a:ext cx="4114800" cy="5029200"/>
+          </a:xfrm>
+          <a:prstGeom prst="rect">
+            <a:avLst/>
+          </a:prstGeom>
+          <a:noFill/>
+        </p:spPr>
+        <p:txBody>
+          <a:bodyPr wrap="square">
+            <a:spAutoFit/>
+          </a:bodyPr>
+          <a:lstStyle/>
+          <a:p>
+            <a:pPr>
+              <a:spcAft>
+                <a:spcPts val="800"/>
+              </a:spcAft>
+              <a:defRPr sz="1600"/>
+            </a:pPr>
+            <a:r>
+              <a:t>Габариты и масса:</a:t>
+            </a:r>
+          </a:p>
+          <a:p>
+            <a:pPr>
+              <a:spcAft>
+                <a:spcPts val="800"/>
+              </a:spcAft>
+              <a:defRPr sz="1600"/>
+            </a:pPr>
+            <a:r>
+              <a:t>• Моноблок: 550×500×300 мм</a:t>
+            </a:r>
+          </a:p>
+          <a:p>
+            <a:pPr>
+              <a:spcAft>
+                <a:spcPts val="800"/>
+              </a:spcAft>
+              <a:defRPr sz="1600"/>
+            </a:pPr>
+            <a:r>
+              <a:t>• Масса моноблока: ≤26 кг</a:t>
+            </a:r>
+          </a:p>
+          <a:p>
+            <a:pPr>
+              <a:spcAft>
+                <a:spcPts val="800"/>
+              </a:spcAft>
+              <a:defRPr sz="1600"/>
+            </a:pPr>
+            <a:r>
+              <a:t>• Кюветодержатель: 300×300×250 мм</a:t>
+            </a:r>
+          </a:p>
+          <a:p>
+            <a:pPr>
+              <a:spcAft>
+                <a:spcPts val="800"/>
+              </a:spcAft>
+              <a:defRPr sz="1600"/>
+            </a:pPr>
+            <a:r>
+              <a:t>• Масса: ≤4 кг</a:t>
+            </a:r>
+          </a:p>
+          <a:p>
+            <a:pPr>
+              <a:spcAft>
+                <a:spcPts val="800"/>
+              </a:spcAft>
+              <a:defRPr sz="1600"/>
+            </a:pPr>
+          </a:p>
+          <a:p>
+            <a:pPr>
+              <a:spcAft>
+                <a:spcPts val="800"/>
+              </a:spcAft>
+              <a:defRPr sz="1600"/>
+            </a:pPr>
+            <a:r>
+              <a:t>Электропитание:</a:t>
+            </a:r>
+          </a:p>
+          <a:p>
+            <a:pPr>
+              <a:spcAft>
+                <a:spcPts val="800"/>
+              </a:spcAft>
+              <a:defRPr sz="1600"/>
+            </a:pPr>
+            <a:r>
+              <a:t>• 28,5 В (диапазон 23–29 В)</a:t>
+            </a:r>
+          </a:p>
+          <a:p>
+            <a:pPr>
+              <a:spcAft>
+                <a:spcPts val="800"/>
+              </a:spcAft>
+              <a:defRPr sz="1600"/>
+            </a:pPr>
+            <a:r>
+              <a:t>• Энергопотребление: ≤110 Вт</a:t>
+            </a:r>
+          </a:p>
+          <a:p>
+            <a:pPr>
+              <a:spcAft>
+                <a:spcPts val="800"/>
+              </a:spcAft>
+              <a:defRPr sz="1600"/>
+            </a:pPr>
+          </a:p>
+          <a:p>
+            <a:pPr>
+              <a:spcAft>
+                <a:spcPts val="800"/>
+              </a:spcAft>
+              <a:defRPr sz="1600"/>
+            </a:pPr>
+            <a:r>
+              <a:t>Условия эксплуатации:</a:t>
+            </a:r>
+          </a:p>
+          <a:p>
+            <a:pPr>
+              <a:spcAft>
+                <a:spcPts val="800"/>
+              </a:spcAft>
+              <a:defRPr sz="1600"/>
+            </a:pPr>
+            <a:r>
+              <a:t>• Температура: +5…+40°C</a:t>
+            </a:r>
+          </a:p>
+          <a:p>
+            <a:pPr>
+              <a:spcAft>
+                <a:spcPts val="800"/>
+              </a:spcAft>
+              <a:defRPr sz="1600"/>
+            </a:pPr>
+            <a:r>
+              <a:t>• Вибрация: до 0,72g</a:t>
+            </a:r>
+          </a:p>
+          <a:p>
+            <a:pPr>
+              <a:spcAft>
+                <a:spcPts val="800"/>
+              </a:spcAft>
+              <a:defRPr sz="1600"/>
+            </a:pPr>
+            <a:r>
+              <a:t>• Удары: до 26,7g</a:t>
+            </a:r>
+          </a:p>
+          <a:p>
+            <a:pPr>
+              <a:spcAft>
+                <a:spcPts val="800"/>
+              </a:spcAft>
+              <a:defRPr sz="1600"/>
+            </a:pPr>
+            <a:r>
+              <a:t>• Линейное ускорение: 22g</a:t>
+            </a:r>
+          </a:p>
+        </p:txBody>
+      </p:sp>
+    </p:spTree>
+  </p:cSld>
+  <p:clrMapOvr>
+    <a:masterClrMapping/>
+  </p:clrMapOvr>
+</p:sld>
+</file>
+
+<file path=ppt/slides/slide19.xml><?xml version="1.0" encoding="utf-8"?>
+<p:sld xmlns:a="http://schemas.openxmlformats.org/drawingml/2006/main" xmlns:p="http://schemas.openxmlformats.org/presentationml/2006/main" xmlns:r="http://schemas.openxmlformats.org/officeDocument/2006/relationships">
+  <p:cSld>
+    <p:spTree>
+      <p:nvGrpSpPr>
+        <p:cNvPr id="1" name=""/>
+        <p:cNvGrpSpPr/>
+        <p:nvPr/>
+      </p:nvGrpSpPr>
+      <p:grpSpPr/>
+      <p:sp>
+        <p:nvSpPr>
+          <p:cNvPr id="2" name="TextBox 1"/>
+          <p:cNvSpPr txBox="1"/>
+          <p:nvPr/>
+        </p:nvSpPr>
+        <p:spPr>
+          <a:xfrm>
+            <a:off x="457200" y="274320"/>
+            <a:ext cx="8229600" cy="731520"/>
+          </a:xfrm>
+          <a:prstGeom prst="rect">
+            <a:avLst/>
+          </a:prstGeom>
+          <a:noFill/>
+        </p:spPr>
+        <p:txBody>
+          <a:bodyPr wrap="none">
+            <a:spAutoFit/>
+          </a:bodyPr>
+          <a:lstStyle/>
+          <a:p>
+            <a:pPr>
+              <a:defRPr sz="2800" b="1">
+                <a:solidFill>
+                  <a:srgbClr val="003366"/>
+                </a:solidFill>
+              </a:defRPr>
+            </a:pPr>
+            <a:r>
+              <a:t>2.5. Исследовательские кюветы — точное распределение</a:t>
+            </a:r>
+          </a:p>
+        </p:txBody>
+      </p:sp>
+      <p:sp>
+        <p:nvSpPr>
+          <p:cNvPr id="3" name="TextBox 2"/>
+          <p:cNvSpPr txBox="1"/>
+          <p:nvPr/>
+        </p:nvSpPr>
+        <p:spPr>
+          <a:xfrm>
+            <a:off x="457200" y="1097280"/>
+            <a:ext cx="8229600" cy="5029200"/>
+          </a:xfrm>
+          <a:prstGeom prst="rect">
+            <a:avLst/>
+          </a:prstGeom>
+          <a:noFill/>
+        </p:spPr>
+        <p:txBody>
+          <a:bodyPr wrap="square">
+            <a:spAutoFit/>
+          </a:bodyPr>
+          <a:lstStyle/>
+          <a:p>
+            <a:pPr>
+              <a:spcAft>
+                <a:spcPts val="600"/>
+              </a:spcAft>
+              <a:defRPr sz="1500">
+                <a:latin typeface="Courier New"/>
+              </a:defRPr>
+            </a:pPr>
+            <a:r>
+              <a:t>Кюветы 1–2:    Поливинилпирролидон (ПВП) — вода                    [металл]</a:t>
+            </a:r>
+          </a:p>
+          <a:p>
+            <a:pPr>
+              <a:spcAft>
+                <a:spcPts val="600"/>
+              </a:spcAft>
+              <a:defRPr sz="1500">
+                <a:latin typeface="Courier New"/>
+              </a:defRPr>
+            </a:pPr>
+            <a:r>
+              <a:t>Кюветы 3–4:    Поливинилметиловый эфир (ПВМЭ) — вода              [металл]</a:t>
+            </a:r>
+          </a:p>
+          <a:p>
+            <a:pPr>
+              <a:spcAft>
+                <a:spcPts val="600"/>
+              </a:spcAft>
+              <a:defRPr sz="1500">
+                <a:latin typeface="Courier New"/>
+              </a:defRPr>
+            </a:pPr>
+            <a:r>
+              <a:t>Кюветы 5–6:    Поливинилиденфторид — силиконовое масло (25–100 мкм) [металл]</a:t>
+            </a:r>
+          </a:p>
+          <a:p>
+            <a:pPr>
+              <a:spcAft>
+                <a:spcPts val="600"/>
+              </a:spcAft>
+              <a:defRPr sz="1500">
+                <a:latin typeface="Courier New"/>
+              </a:defRPr>
+            </a:pPr>
+            <a:r>
+              <a:t>Кюветы 7–8:    Полистирол 0,5 мкм — вода                              [полиамид]</a:t>
+            </a:r>
+          </a:p>
+          <a:p>
+            <a:pPr>
+              <a:spcAft>
+                <a:spcPts val="600"/>
+              </a:spcAft>
+              <a:defRPr sz="1500">
+                <a:latin typeface="Courier New"/>
+              </a:defRPr>
+            </a:pPr>
+            <a:r>
+              <a:t>Кюветы 9–10:   Полистирол 10 мкм — вода                               [полиамид]</a:t>
+            </a:r>
+          </a:p>
+          <a:p>
+            <a:pPr>
+              <a:spcAft>
+                <a:spcPts val="600"/>
+              </a:spcAft>
+              <a:defRPr sz="1500">
+                <a:latin typeface="Courier New"/>
+              </a:defRPr>
+            </a:pPr>
+            <a:r>
+              <a:t>Кюветы 11–13:  Стеклосферы 25–40 мкм — вода                           [полиамид]</a:t>
+            </a:r>
+          </a:p>
+          <a:p>
+            <a:pPr>
+              <a:spcAft>
+                <a:spcPts val="600"/>
+              </a:spcAft>
+              <a:defRPr sz="1500">
+                <a:latin typeface="Courier New"/>
+              </a:defRPr>
+            </a:pPr>
+            <a:r>
+              <a:t>Кюветы 14–15:  Фуллеренсодержащая сажа 1–50 мкм — вода                [полиамид]</a:t>
+            </a:r>
+          </a:p>
+          <a:p>
+            <a:pPr>
+              <a:spcAft>
+                <a:spcPts val="600"/>
+              </a:spcAft>
+              <a:defRPr sz="1500">
+                <a:latin typeface="Courier New"/>
+              </a:defRPr>
+            </a:pPr>
+            <a:r>
+              <a:t>Кюветы 16–18:  Глобулярный углерод 0,5 мкм — вода                     [полиамид]</a:t>
+            </a:r>
+          </a:p>
+          <a:p>
+            <a:pPr>
+              <a:spcAft>
+                <a:spcPts val="600"/>
+              </a:spcAft>
+              <a:defRPr sz="1500">
+                <a:latin typeface="Courier New"/>
+              </a:defRPr>
+            </a:pPr>
+            <a:r>
+              <a:t>Кюветы 19–20:  Магнетит — силиконовое масло                           [полиамид]</a:t>
+            </a:r>
+          </a:p>
+        </p:txBody>
+      </p:sp>
+    </p:spTree>
+  </p:cSld>
+  <p:clrMapOvr>
+    <a:masterClrMapping/>
+  </p:clrMapOvr>
+</p:sld>
+</file>
+
 <file path=ppt/slides/slide2.xml><?xml version="1.0" encoding="utf-8"?>
 <p:sld xmlns:a="http://schemas.openxmlformats.org/drawingml/2006/main" xmlns:p="http://schemas.openxmlformats.org/presentationml/2006/main" xmlns:r="http://schemas.openxmlformats.org/officeDocument/2006/relationships">
   <p:cSld>
@@ -4557,6 +5198,2369 @@
             </a:pPr>
             <a:r>
               <a:t>Задача: создать прибор для наблюдения за активными дисперсными средами в невесомости под воздействием управляемых полей.</a:t>
+            </a:r>
+          </a:p>
+        </p:txBody>
+      </p:sp>
+    </p:spTree>
+  </p:cSld>
+  <p:clrMapOvr>
+    <a:masterClrMapping/>
+  </p:clrMapOvr>
+</p:sld>
+</file>
+
+<file path=ppt/slides/slide20.xml><?xml version="1.0" encoding="utf-8"?>
+<p:sld xmlns:a="http://schemas.openxmlformats.org/drawingml/2006/main" xmlns:p="http://schemas.openxmlformats.org/presentationml/2006/main" xmlns:r="http://schemas.openxmlformats.org/officeDocument/2006/relationships">
+  <p:cSld>
+    <p:spTree>
+      <p:nvGrpSpPr>
+        <p:cNvPr id="1" name=""/>
+        <p:cNvGrpSpPr/>
+        <p:nvPr/>
+      </p:nvGrpSpPr>
+      <p:grpSpPr/>
+      <p:sp>
+        <p:nvSpPr>
+          <p:cNvPr id="2" name="TextBox 1"/>
+          <p:cNvSpPr txBox="1"/>
+          <p:nvPr/>
+        </p:nvSpPr>
+        <p:spPr>
+          <a:xfrm>
+            <a:off x="457200" y="274320"/>
+            <a:ext cx="8229600" cy="731520"/>
+          </a:xfrm>
+          <a:prstGeom prst="rect">
+            <a:avLst/>
+          </a:prstGeom>
+          <a:noFill/>
+        </p:spPr>
+        <p:txBody>
+          <a:bodyPr wrap="none">
+            <a:spAutoFit/>
+          </a:bodyPr>
+          <a:lstStyle/>
+          <a:p>
+            <a:pPr>
+              <a:defRPr sz="2800" b="1">
+                <a:solidFill>
+                  <a:srgbClr val="003366"/>
+                </a:solidFill>
+              </a:defRPr>
+            </a:pPr>
+            <a:r>
+              <a:t>2.2. Космонавт Дмитрий Петелин с прибором «Дисперсия» на МКС</a:t>
+            </a:r>
+          </a:p>
+        </p:txBody>
+      </p:sp>
+      <p:pic>
+        <p:nvPicPr>
+          <p:cNvPr id="3" name="Picture 2" descr="lasers_1_780x519.jpg"/>
+          <p:cNvPicPr>
+            <a:picLocks noChangeAspect="1"/>
+          </p:cNvPicPr>
+          <p:nvPr/>
+        </p:nvPicPr>
+        <p:blipFill>
+          <a:blip r:embed="rId2"/>
+          <a:stretch>
+            <a:fillRect/>
+          </a:stretch>
+        </p:blipFill>
+        <p:spPr>
+          <a:xfrm>
+            <a:off x="1371600" y="1188720"/>
+            <a:ext cx="6400800" cy="4258993"/>
+          </a:xfrm>
+          <a:prstGeom prst="rect">
+            <a:avLst/>
+          </a:prstGeom>
+        </p:spPr>
+      </p:pic>
+    </p:spTree>
+  </p:cSld>
+  <p:clrMapOvr>
+    <a:masterClrMapping/>
+  </p:clrMapOvr>
+</p:sld>
+</file>
+
+<file path=ppt/slides/slide21.xml><?xml version="1.0" encoding="utf-8"?>
+<p:sld xmlns:a="http://schemas.openxmlformats.org/drawingml/2006/main" xmlns:p="http://schemas.openxmlformats.org/presentationml/2006/main" xmlns:r="http://schemas.openxmlformats.org/officeDocument/2006/relationships">
+  <p:cSld>
+    <p:spTree>
+      <p:nvGrpSpPr>
+        <p:cNvPr id="1" name=""/>
+        <p:cNvGrpSpPr/>
+        <p:nvPr/>
+      </p:nvGrpSpPr>
+      <p:grpSpPr/>
+      <p:sp>
+        <p:nvSpPr>
+          <p:cNvPr id="2" name="TextBox 1"/>
+          <p:cNvSpPr txBox="1"/>
+          <p:nvPr/>
+        </p:nvSpPr>
+        <p:spPr>
+          <a:xfrm>
+            <a:off x="457200" y="274320"/>
+            <a:ext cx="8229600" cy="731520"/>
+          </a:xfrm>
+          <a:prstGeom prst="rect">
+            <a:avLst/>
+          </a:prstGeom>
+          <a:noFill/>
+        </p:spPr>
+        <p:txBody>
+          <a:bodyPr wrap="none">
+            <a:spAutoFit/>
+          </a:bodyPr>
+          <a:lstStyle/>
+          <a:p>
+            <a:pPr>
+              <a:defRPr sz="2800" b="1">
+                <a:solidFill>
+                  <a:srgbClr val="003366"/>
+                </a:solidFill>
+              </a:defRPr>
+            </a:pPr>
+            <a:r>
+              <a:t>5.1. Целевая работа «Микс-Реголит» — детали</a:t>
+            </a:r>
+          </a:p>
+        </p:txBody>
+      </p:sp>
+      <p:sp>
+        <p:nvSpPr>
+          <p:cNvPr id="3" name="TextBox 2"/>
+          <p:cNvSpPr txBox="1"/>
+          <p:nvPr/>
+        </p:nvSpPr>
+        <p:spPr>
+          <a:xfrm>
+            <a:off x="457200" y="1097280"/>
+            <a:ext cx="4114800" cy="5029200"/>
+          </a:xfrm>
+          <a:prstGeom prst="rect">
+            <a:avLst/>
+          </a:prstGeom>
+          <a:noFill/>
+        </p:spPr>
+        <p:txBody>
+          <a:bodyPr wrap="square">
+            <a:spAutoFit/>
+          </a:bodyPr>
+          <a:lstStyle/>
+          <a:p>
+            <a:pPr>
+              <a:spcAft>
+                <a:spcPts val="1000"/>
+              </a:spcAft>
+              <a:defRPr sz="1800"/>
+            </a:pPr>
+            <a:r>
+              <a:t>Масштаб эксперимента:</a:t>
+            </a:r>
+          </a:p>
+          <a:p>
+            <a:pPr>
+              <a:spcAft>
+                <a:spcPts val="1000"/>
+              </a:spcAft>
+              <a:defRPr sz="1800"/>
+            </a:pPr>
+            <a:r>
+              <a:t>• 60 кювет (против 20 в базовом)</a:t>
+            </a:r>
+          </a:p>
+          <a:p>
+            <a:pPr>
+              <a:spcAft>
+                <a:spcPts val="1000"/>
+              </a:spcAft>
+              <a:defRPr sz="1800"/>
+            </a:pPr>
+            <a:r>
+              <a:t>• 3 кюветодержателя</a:t>
+            </a:r>
+          </a:p>
+          <a:p>
+            <a:pPr>
+              <a:spcAft>
+                <a:spcPts val="1000"/>
+              </a:spcAft>
+              <a:defRPr sz="1800"/>
+            </a:pPr>
+            <a:r>
+              <a:t>• Масса материалов: 6,3 кг</a:t>
+            </a:r>
+          </a:p>
+          <a:p>
+            <a:pPr>
+              <a:spcAft>
+                <a:spcPts val="1000"/>
+              </a:spcAft>
+              <a:defRPr sz="1800"/>
+            </a:pPr>
+            <a:r>
+              <a:t>• Возвращаемый груз: 3,0 кг</a:t>
+            </a:r>
+          </a:p>
+          <a:p>
+            <a:pPr>
+              <a:spcAft>
+                <a:spcPts val="1000"/>
+              </a:spcAft>
+              <a:defRPr sz="1800"/>
+            </a:pPr>
+          </a:p>
+          <a:p>
+            <a:pPr>
+              <a:spcAft>
+                <a:spcPts val="1000"/>
+              </a:spcAft>
+              <a:defRPr sz="1800"/>
+            </a:pPr>
+            <a:r>
+              <a:t>Материалы:</a:t>
+            </a:r>
+          </a:p>
+          <a:p>
+            <a:pPr>
+              <a:spcAft>
+                <a:spcPts val="1000"/>
+              </a:spcAft>
+              <a:defRPr sz="1800"/>
+            </a:pPr>
+            <a:r>
+              <a:t>• Имитатор лунного грунта — базальт</a:t>
+            </a:r>
+          </a:p>
+          <a:p>
+            <a:pPr>
+              <a:spcAft>
+                <a:spcPts val="1000"/>
+              </a:spcAft>
+              <a:defRPr sz="1800"/>
+            </a:pPr>
+            <a:r>
+              <a:t>• Связующие: ПС, ПА, ПЭЭК, ФФС</a:t>
+            </a:r>
+          </a:p>
+          <a:p>
+            <a:pPr>
+              <a:spcAft>
+                <a:spcPts val="1000"/>
+              </a:spcAft>
+              <a:defRPr sz="1800"/>
+            </a:pPr>
+            <a:r>
+              <a:t>• Металлические порошки</a:t>
+            </a:r>
+          </a:p>
+          <a:p>
+            <a:pPr>
+              <a:spcAft>
+                <a:spcPts val="1000"/>
+              </a:spcAft>
+              <a:defRPr sz="1800"/>
+            </a:pPr>
+          </a:p>
+          <a:p>
+            <a:pPr>
+              <a:spcAft>
+                <a:spcPts val="1000"/>
+              </a:spcAft>
+              <a:defRPr sz="1800"/>
+            </a:pPr>
+            <a:r>
+              <a:t>Кювета типа Б:</a:t>
+            </a:r>
+          </a:p>
+          <a:p>
+            <a:pPr>
+              <a:spcAft>
+                <a:spcPts val="1000"/>
+              </a:spcAft>
+              <a:defRPr sz="1800"/>
+            </a:pPr>
+            <a:r>
+              <a:t>• Прижимной винт с гайкой</a:t>
+            </a:r>
+          </a:p>
+          <a:p>
+            <a:pPr>
+              <a:spcAft>
+                <a:spcPts val="1000"/>
+              </a:spcAft>
+              <a:defRPr sz="1800"/>
+            </a:pPr>
+            <a:r>
+              <a:t>• Подвижная пластина для фиксации</a:t>
+            </a:r>
+          </a:p>
+          <a:p>
+            <a:pPr>
+              <a:spcAft>
+                <a:spcPts val="1000"/>
+              </a:spcAft>
+              <a:defRPr sz="1800"/>
+            </a:pPr>
+            <a:r>
+              <a:t>• Ручное освобождение порошка</a:t>
+            </a:r>
+          </a:p>
+        </p:txBody>
+      </p:sp>
+      <p:sp>
+        <p:nvSpPr>
+          <p:cNvPr id="4" name="TextBox 3"/>
+          <p:cNvSpPr txBox="1"/>
+          <p:nvPr/>
+        </p:nvSpPr>
+        <p:spPr>
+          <a:xfrm>
+            <a:off x="4754880" y="1097280"/>
+            <a:ext cx="4114800" cy="5029200"/>
+          </a:xfrm>
+          <a:prstGeom prst="rect">
+            <a:avLst/>
+          </a:prstGeom>
+          <a:noFill/>
+        </p:spPr>
+        <p:txBody>
+          <a:bodyPr wrap="square">
+            <a:spAutoFit/>
+          </a:bodyPr>
+          <a:lstStyle/>
+          <a:p>
+            <a:pPr>
+              <a:spcAft>
+                <a:spcPts val="1000"/>
+              </a:spcAft>
+              <a:defRPr sz="1800"/>
+            </a:pPr>
+            <a:r>
+              <a:t>Работа экипажа:</a:t>
+            </a:r>
+          </a:p>
+          <a:p>
+            <a:pPr>
+              <a:spcAft>
+                <a:spcPts val="1000"/>
+              </a:spcAft>
+              <a:defRPr sz="1800"/>
+            </a:pPr>
+            <a:r>
+              <a:t>• Трудозатраты: 19 часов</a:t>
+            </a:r>
+          </a:p>
+          <a:p>
+            <a:pPr>
+              <a:spcAft>
+                <a:spcPts val="1000"/>
+              </a:spcAft>
+              <a:defRPr sz="1800"/>
+            </a:pPr>
+            <a:r>
+              <a:t>• Время на станции: 3 суток</a:t>
+            </a:r>
+          </a:p>
+          <a:p>
+            <a:pPr>
+              <a:spcAft>
+                <a:spcPts val="1000"/>
+              </a:spcAft>
+              <a:defRPr sz="1800"/>
+            </a:pPr>
+            <a:r>
+              <a:t>• Информация: 25 Гбит</a:t>
+            </a:r>
+          </a:p>
+          <a:p>
+            <a:pPr>
+              <a:spcAft>
+                <a:spcPts val="1000"/>
+              </a:spcAft>
+              <a:defRPr sz="1800"/>
+            </a:pPr>
+          </a:p>
+          <a:p>
+            <a:pPr>
+              <a:spcAft>
+                <a:spcPts val="1000"/>
+              </a:spcAft>
+              <a:defRPr sz="1800"/>
+            </a:pPr>
+            <a:r>
+              <a:t>Сроки:</a:t>
+            </a:r>
+          </a:p>
+          <a:p>
+            <a:pPr>
+              <a:spcAft>
+                <a:spcPts val="1000"/>
+              </a:spcAft>
+              <a:defRPr sz="1800"/>
+            </a:pPr>
+            <a:r>
+              <a:t>• 2025 — доработка ПМО и кювет</a:t>
+            </a:r>
+          </a:p>
+          <a:p>
+            <a:pPr>
+              <a:spcAft>
+                <a:spcPts val="1000"/>
+              </a:spcAft>
+              <a:defRPr sz="1800"/>
+            </a:pPr>
+            <a:r>
+              <a:t>• 2026 — изготовление и отработка</a:t>
+            </a:r>
+          </a:p>
+          <a:p>
+            <a:pPr>
+              <a:spcAft>
+                <a:spcPts val="1000"/>
+              </a:spcAft>
+              <a:defRPr sz="1800"/>
+            </a:pPr>
+            <a:r>
+              <a:t>• Стоимость: 25 млн руб.</a:t>
+            </a:r>
+          </a:p>
+          <a:p>
+            <a:pPr>
+              <a:spcAft>
+                <a:spcPts val="1000"/>
+              </a:spcAft>
+              <a:defRPr sz="1800"/>
+            </a:pPr>
+          </a:p>
+          <a:p>
+            <a:pPr>
+              <a:spcAft>
+                <a:spcPts val="1000"/>
+              </a:spcAft>
+              <a:defRPr sz="1800"/>
+            </a:pPr>
+            <a:r>
+              <a:t>Заказчик: РКК «Энергия"</a:t>
+            </a:r>
+          </a:p>
+          <a:p>
+            <a:pPr>
+              <a:spcAft>
+                <a:spcPts val="1000"/>
+              </a:spcAft>
+              <a:defRPr sz="1800"/>
+            </a:pPr>
+            <a:r>
+              <a:t>Разработчик: АО «Лазерные системы</a:t>
+            </a:r>
+          </a:p>
+        </p:txBody>
+      </p:sp>
+      <p:pic>
+        <p:nvPicPr>
+          <p:cNvPr id="5" name="Picture 4" descr="na_kyuveta_3_10.png"/>
+          <p:cNvPicPr>
+            <a:picLocks noChangeAspect="1"/>
+          </p:cNvPicPr>
+          <p:nvPr/>
+        </p:nvPicPr>
+        <p:blipFill>
+          <a:blip r:embed="rId2"/>
+          <a:stretch>
+            <a:fillRect/>
+          </a:stretch>
+        </p:blipFill>
+        <p:spPr>
+          <a:xfrm>
+            <a:off x="6858000" y="3657600"/>
+            <a:ext cx="2011680" cy="1226876"/>
+          </a:xfrm>
+          <a:prstGeom prst="rect">
+            <a:avLst/>
+          </a:prstGeom>
+        </p:spPr>
+      </p:pic>
+    </p:spTree>
+  </p:cSld>
+  <p:clrMapOvr>
+    <a:masterClrMapping/>
+  </p:clrMapOvr>
+</p:sld>
+</file>
+
+<file path=ppt/slides/slide22.xml><?xml version="1.0" encoding="utf-8"?>
+<p:sld xmlns:a="http://schemas.openxmlformats.org/drawingml/2006/main" xmlns:p="http://schemas.openxmlformats.org/presentationml/2006/main" xmlns:r="http://schemas.openxmlformats.org/officeDocument/2006/relationships">
+  <p:cSld>
+    <p:spTree>
+      <p:nvGrpSpPr>
+        <p:cNvPr id="1" name=""/>
+        <p:cNvGrpSpPr/>
+        <p:nvPr/>
+      </p:nvGrpSpPr>
+      <p:grpSpPr/>
+      <p:sp>
+        <p:nvSpPr>
+          <p:cNvPr id="2" name="TextBox 1"/>
+          <p:cNvSpPr txBox="1"/>
+          <p:nvPr/>
+        </p:nvSpPr>
+        <p:spPr>
+          <a:xfrm>
+            <a:off x="457200" y="274320"/>
+            <a:ext cx="8229600" cy="731520"/>
+          </a:xfrm>
+          <a:prstGeom prst="rect">
+            <a:avLst/>
+          </a:prstGeom>
+          <a:noFill/>
+        </p:spPr>
+        <p:txBody>
+          <a:bodyPr wrap="none">
+            <a:spAutoFit/>
+          </a:bodyPr>
+          <a:lstStyle/>
+          <a:p>
+            <a:pPr>
+              <a:defRPr sz="2800" b="1">
+                <a:solidFill>
+                  <a:srgbClr val="003366"/>
+                </a:solidFill>
+              </a:defRPr>
+            </a:pPr>
+            <a:r>
+              <a:t>5.2. Проект «Пыль-УФ» — исследования в открытом космосе</a:t>
+            </a:r>
+          </a:p>
+        </p:txBody>
+      </p:sp>
+      <p:sp>
+        <p:nvSpPr>
+          <p:cNvPr id="3" name="TextBox 2"/>
+          <p:cNvSpPr txBox="1"/>
+          <p:nvPr/>
+        </p:nvSpPr>
+        <p:spPr>
+          <a:xfrm>
+            <a:off x="457200" y="1097280"/>
+            <a:ext cx="4114800" cy="5029200"/>
+          </a:xfrm>
+          <a:prstGeom prst="rect">
+            <a:avLst/>
+          </a:prstGeom>
+          <a:noFill/>
+        </p:spPr>
+        <p:txBody>
+          <a:bodyPr wrap="square">
+            <a:spAutoFit/>
+          </a:bodyPr>
+          <a:lstStyle/>
+          <a:p>
+            <a:pPr>
+              <a:spcAft>
+                <a:spcPts val="1000"/>
+              </a:spcAft>
+              <a:defRPr sz="1800"/>
+            </a:pPr>
+            <a:r>
+              <a:t>Цель:</a:t>
+            </a:r>
+          </a:p>
+          <a:p>
+            <a:pPr>
+              <a:spcAft>
+                <a:spcPts val="1000"/>
+              </a:spcAft>
+              <a:defRPr sz="1800"/>
+            </a:pPr>
+            <a:r>
+              <a:t>• Исследование плазменно-пылевых образований</a:t>
+            </a:r>
+          </a:p>
+          <a:p>
+            <a:pPr>
+              <a:spcAft>
+                <a:spcPts val="1000"/>
+              </a:spcAft>
+              <a:defRPr sz="1800"/>
+            </a:pPr>
+            <a:r>
+              <a:t>• Влияние УФ-излучения Солнца</a:t>
+            </a:r>
+          </a:p>
+          <a:p>
+            <a:pPr>
+              <a:spcAft>
+                <a:spcPts val="1000"/>
+              </a:spcAft>
+              <a:defRPr sz="1800"/>
+            </a:pPr>
+            <a:r>
+              <a:t>• Поведение заряженной пыли</a:t>
+            </a:r>
+          </a:p>
+          <a:p>
+            <a:pPr>
+              <a:spcAft>
+                <a:spcPts val="1000"/>
+              </a:spcAft>
+              <a:defRPr sz="1800"/>
+            </a:pPr>
+          </a:p>
+          <a:p>
+            <a:pPr>
+              <a:spcAft>
+                <a:spcPts val="1000"/>
+              </a:spcAft>
+              <a:defRPr sz="1800"/>
+            </a:pPr>
+            <a:r>
+              <a:t>Установка:</a:t>
+            </a:r>
+          </a:p>
+          <a:p>
+            <a:pPr>
+              <a:spcAft>
+                <a:spcPts val="1000"/>
+              </a:spcAft>
+              <a:defRPr sz="1800"/>
+            </a:pPr>
+            <a:r>
+              <a:t>• Выдвижная 5,5-метровая платформа</a:t>
+            </a:r>
+          </a:p>
+          <a:p>
+            <a:pPr>
+              <a:spcAft>
+                <a:spcPts val="1000"/>
+              </a:spcAft>
+              <a:defRPr sz="1800"/>
+            </a:pPr>
+            <a:r>
+              <a:t>• Контейнеры с пылевыми частицами</a:t>
+            </a:r>
+          </a:p>
+          <a:p>
+            <a:pPr>
+              <a:spcAft>
+                <a:spcPts val="1000"/>
+              </a:spcAft>
+              <a:defRPr sz="1800"/>
+            </a:pPr>
+            <a:r>
+              <a:t>• Вибрационный выброс облака</a:t>
+            </a:r>
+          </a:p>
+          <a:p>
+            <a:pPr>
+              <a:spcAft>
+                <a:spcPts val="1000"/>
+              </a:spcAft>
+              <a:defRPr sz="1800"/>
+            </a:pPr>
+            <a:r>
+              <a:t>• УФ-лампа для облучения</a:t>
+            </a:r>
+          </a:p>
+          <a:p>
+            <a:pPr>
+              <a:spcAft>
+                <a:spcPts val="1000"/>
+              </a:spcAft>
+              <a:defRPr sz="1800"/>
+            </a:pPr>
+          </a:p>
+          <a:p>
+            <a:pPr>
+              <a:spcAft>
+                <a:spcPts val="1000"/>
+              </a:spcAft>
+              <a:defRPr sz="1800"/>
+            </a:pPr>
+            <a:r>
+              <a:t>Расположение:</a:t>
+            </a:r>
+          </a:p>
+          <a:p>
+            <a:pPr>
+              <a:spcAft>
+                <a:spcPts val="1000"/>
+              </a:spcAft>
+              <a:defRPr sz="1800"/>
+            </a:pPr>
+            <a:r>
+              <a:t>• Открытый люк ТГК «Прогресс-МС"</a:t>
+            </a:r>
+          </a:p>
+          <a:p>
+            <a:pPr>
+              <a:spcAft>
+                <a:spcPts val="1000"/>
+              </a:spcAft>
+              <a:defRPr sz="1800"/>
+            </a:pPr>
+            <a:r>
+              <a:t>• Регистрирующая аппаратура</a:t>
+            </a:r>
+          </a:p>
+          <a:p>
+            <a:pPr>
+              <a:spcAft>
+                <a:spcPts val="1000"/>
+              </a:spcAft>
+              <a:defRPr sz="1800"/>
+            </a:pPr>
+            <a:r>
+              <a:t>• Платформа выдвигается в открытый космос</a:t>
+            </a:r>
+          </a:p>
+        </p:txBody>
+      </p:sp>
+      <p:pic>
+        <p:nvPicPr>
+          <p:cNvPr id="4" name="Picture 3" descr="plakaty_1_1280x720.jpg"/>
+          <p:cNvPicPr>
+            <a:picLocks noChangeAspect="1"/>
+          </p:cNvPicPr>
+          <p:nvPr/>
+        </p:nvPicPr>
+        <p:blipFill>
+          <a:blip r:embed="rId2"/>
+          <a:stretch>
+            <a:fillRect/>
+          </a:stretch>
+        </p:blipFill>
+        <p:spPr>
+          <a:xfrm>
+            <a:off x="4754880" y="1097280"/>
+            <a:ext cx="4114800" cy="2314575"/>
+          </a:xfrm>
+          <a:prstGeom prst="rect">
+            <a:avLst/>
+          </a:prstGeom>
+        </p:spPr>
+      </p:pic>
+    </p:spTree>
+  </p:cSld>
+  <p:clrMapOvr>
+    <a:masterClrMapping/>
+  </p:clrMapOvr>
+</p:sld>
+</file>
+
+<file path=ppt/slides/slide23.xml><?xml version="1.0" encoding="utf-8"?>
+<p:sld xmlns:a="http://schemas.openxmlformats.org/drawingml/2006/main" xmlns:p="http://schemas.openxmlformats.org/presentationml/2006/main" xmlns:r="http://schemas.openxmlformats.org/officeDocument/2006/relationships">
+  <p:cSld>
+    <p:spTree>
+      <p:nvGrpSpPr>
+        <p:cNvPr id="1" name=""/>
+        <p:cNvGrpSpPr/>
+        <p:nvPr/>
+      </p:nvGrpSpPr>
+      <p:grpSpPr/>
+      <p:sp>
+        <p:nvSpPr>
+          <p:cNvPr id="2" name="TextBox 1"/>
+          <p:cNvSpPr txBox="1"/>
+          <p:nvPr/>
+        </p:nvSpPr>
+        <p:spPr>
+          <a:xfrm>
+            <a:off x="457200" y="274320"/>
+            <a:ext cx="8229600" cy="731520"/>
+          </a:xfrm>
+          <a:prstGeom prst="rect">
+            <a:avLst/>
+          </a:prstGeom>
+          <a:noFill/>
+        </p:spPr>
+        <p:txBody>
+          <a:bodyPr wrap="none">
+            <a:spAutoFit/>
+          </a:bodyPr>
+          <a:lstStyle/>
+          <a:p>
+            <a:pPr>
+              <a:defRPr sz="2800" b="1">
+                <a:solidFill>
+                  <a:srgbClr val="003366"/>
+                </a:solidFill>
+              </a:defRPr>
+            </a:pPr>
+            <a:r>
+              <a:t>3.3. Наземные предполётные испытания</a:t>
+            </a:r>
+          </a:p>
+        </p:txBody>
+      </p:sp>
+      <p:sp>
+        <p:nvSpPr>
+          <p:cNvPr id="3" name="TextBox 2"/>
+          <p:cNvSpPr txBox="1"/>
+          <p:nvPr/>
+        </p:nvSpPr>
+        <p:spPr>
+          <a:xfrm>
+            <a:off x="457200" y="1097280"/>
+            <a:ext cx="4114800" cy="5029200"/>
+          </a:xfrm>
+          <a:prstGeom prst="rect">
+            <a:avLst/>
+          </a:prstGeom>
+          <a:noFill/>
+        </p:spPr>
+        <p:txBody>
+          <a:bodyPr wrap="square">
+            <a:spAutoFit/>
+          </a:bodyPr>
+          <a:lstStyle/>
+          <a:p>
+            <a:pPr>
+              <a:spcAft>
+                <a:spcPts val="1000"/>
+              </a:spcAft>
+              <a:defRPr sz="1800"/>
+            </a:pPr>
+            <a:r>
+              <a:t>Механические испытания:</a:t>
+            </a:r>
+          </a:p>
+          <a:p>
+            <a:pPr>
+              <a:spcAft>
+                <a:spcPts val="1000"/>
+              </a:spcAft>
+              <a:defRPr sz="1800"/>
+            </a:pPr>
+            <a:r>
+              <a:t>• Вибростенды — синусоидальная и случайная вибрация</a:t>
+            </a:r>
+          </a:p>
+          <a:p>
+            <a:pPr>
+              <a:spcAft>
+                <a:spcPts val="1000"/>
+              </a:spcAft>
+              <a:defRPr sz="1800"/>
+            </a:pPr>
+            <a:r>
+              <a:t>• Ударные стенды — одиночные и многократные удары</a:t>
+            </a:r>
+          </a:p>
+          <a:p>
+            <a:pPr>
+              <a:spcAft>
+                <a:spcPts val="1000"/>
+              </a:spcAft>
+              <a:defRPr sz="1800"/>
+            </a:pPr>
+            <a:r>
+              <a:t>• Проверка прочности конструкции</a:t>
+            </a:r>
+          </a:p>
+          <a:p>
+            <a:pPr>
+              <a:spcAft>
+                <a:spcPts val="1000"/>
+              </a:spcAft>
+              <a:defRPr sz="1800"/>
+            </a:pPr>
+          </a:p>
+          <a:p>
+            <a:pPr>
+              <a:spcAft>
+                <a:spcPts val="1000"/>
+              </a:spcAft>
+              <a:defRPr sz="1800"/>
+            </a:pPr>
+            <a:r>
+              <a:t>Климатические испытания:</a:t>
+            </a:r>
+          </a:p>
+          <a:p>
+            <a:pPr>
+              <a:spcAft>
+                <a:spcPts val="1000"/>
+              </a:spcAft>
+              <a:defRPr sz="1800"/>
+            </a:pPr>
+            <a:r>
+              <a:t>• Термокамеры — температурные циклы</a:t>
+            </a:r>
+          </a:p>
+          <a:p>
+            <a:pPr>
+              <a:spcAft>
+                <a:spcPts val="1000"/>
+              </a:spcAft>
+              <a:defRPr sz="1800"/>
+            </a:pPr>
+            <a:r>
+              <a:t>• Проверка работоспособности при −50…+50°C</a:t>
+            </a:r>
+          </a:p>
+          <a:p>
+            <a:pPr>
+              <a:spcAft>
+                <a:spcPts val="1000"/>
+              </a:spcAft>
+              <a:defRPr sz="1800"/>
+            </a:pPr>
+            <a:r>
+              <a:t>• Испытания на влажность и давление</a:t>
+            </a:r>
+          </a:p>
+          <a:p>
+            <a:pPr>
+              <a:spcAft>
+                <a:spcPts val="1000"/>
+              </a:spcAft>
+              <a:defRPr sz="1800"/>
+            </a:pPr>
+          </a:p>
+          <a:p>
+            <a:pPr>
+              <a:spcAft>
+                <a:spcPts val="1000"/>
+              </a:spcAft>
+              <a:defRPr sz="1800"/>
+            </a:pPr>
+            <a:r>
+              <a:t>Радиационные испытания:</a:t>
+            </a:r>
+          </a:p>
+          <a:p>
+            <a:pPr>
+              <a:spcAft>
+                <a:spcPts val="1000"/>
+              </a:spcAft>
+              <a:defRPr sz="1800"/>
+            </a:pPr>
+            <a:r>
+              <a:t>• Проверка устойчивости к космическому излучению</a:t>
+            </a:r>
+          </a:p>
+          <a:p>
+            <a:pPr>
+              <a:spcAft>
+                <a:spcPts val="1000"/>
+              </a:spcAft>
+              <a:defRPr sz="1800"/>
+            </a:pPr>
+            <a:r>
+              <a:t>• Потоки протонов и тяжёлых заряженных частиц</a:t>
+            </a:r>
+          </a:p>
+          <a:p>
+            <a:pPr>
+              <a:spcAft>
+                <a:spcPts val="1000"/>
+              </a:spcAft>
+              <a:defRPr sz="1800"/>
+            </a:pPr>
+          </a:p>
+          <a:p>
+            <a:pPr>
+              <a:spcAft>
+                <a:spcPts val="1000"/>
+              </a:spcAft>
+              <a:defRPr sz="1800"/>
+            </a:pPr>
+            <a:r>
+              <a:t>Результат:</a:t>
+            </a:r>
+          </a:p>
+          <a:p>
+            <a:pPr>
+              <a:spcAft>
+                <a:spcPts val="1000"/>
+              </a:spcAft>
+              <a:defRPr sz="1800"/>
+            </a:pPr>
+            <a:r>
+              <a:t>• Прибор выдержал все испытания</a:t>
+            </a:r>
+          </a:p>
+          <a:p>
+            <a:pPr>
+              <a:spcAft>
+                <a:spcPts val="1000"/>
+              </a:spcAft>
+              <a:defRPr sz="1800"/>
+            </a:pPr>
+            <a:r>
+              <a:t>• Допущен к полёту на МКС</a:t>
+            </a:r>
+          </a:p>
+        </p:txBody>
+      </p:sp>
+      <p:pic>
+        <p:nvPicPr>
+          <p:cNvPr id="4" name="Picture 3" descr="lasers_6_494x914.jpg"/>
+          <p:cNvPicPr>
+            <a:picLocks noChangeAspect="1"/>
+          </p:cNvPicPr>
+          <p:nvPr/>
+        </p:nvPicPr>
+        <p:blipFill>
+          <a:blip r:embed="rId2"/>
+          <a:stretch>
+            <a:fillRect/>
+          </a:stretch>
+        </p:blipFill>
+        <p:spPr>
+          <a:xfrm>
+            <a:off x="5029200" y="1097280"/>
+            <a:ext cx="2471081" cy="4572000"/>
+          </a:xfrm>
+          <a:prstGeom prst="rect">
+            <a:avLst/>
+          </a:prstGeom>
+        </p:spPr>
+      </p:pic>
+    </p:spTree>
+  </p:cSld>
+  <p:clrMapOvr>
+    <a:masterClrMapping/>
+  </p:clrMapOvr>
+</p:sld>
+</file>
+
+<file path=ppt/slides/slide24.xml><?xml version="1.0" encoding="utf-8"?>
+<p:sld xmlns:a="http://schemas.openxmlformats.org/drawingml/2006/main" xmlns:p="http://schemas.openxmlformats.org/presentationml/2006/main" xmlns:r="http://schemas.openxmlformats.org/officeDocument/2006/relationships">
+  <p:cSld>
+    <p:spTree>
+      <p:nvGrpSpPr>
+        <p:cNvPr id="1" name=""/>
+        <p:cNvGrpSpPr/>
+        <p:nvPr/>
+      </p:nvGrpSpPr>
+      <p:grpSpPr/>
+      <p:sp>
+        <p:nvSpPr>
+          <p:cNvPr id="2" name="TextBox 1"/>
+          <p:cNvSpPr txBox="1"/>
+          <p:nvPr/>
+        </p:nvSpPr>
+        <p:spPr>
+          <a:xfrm>
+            <a:off x="457200" y="274320"/>
+            <a:ext cx="8229600" cy="731520"/>
+          </a:xfrm>
+          <a:prstGeom prst="rect">
+            <a:avLst/>
+          </a:prstGeom>
+          <a:noFill/>
+        </p:spPr>
+        <p:txBody>
+          <a:bodyPr wrap="none">
+            <a:spAutoFit/>
+          </a:bodyPr>
+          <a:lstStyle/>
+          <a:p>
+            <a:pPr>
+              <a:defRPr sz="2800" b="1">
+                <a:solidFill>
+                  <a:srgbClr val="003366"/>
+                </a:solidFill>
+              </a:defRPr>
+            </a:pPr>
+            <a:r>
+              <a:t>2.6. Виброопора и механизм установки кюветы</a:t>
+            </a:r>
+          </a:p>
+        </p:txBody>
+      </p:sp>
+      <p:pic>
+        <p:nvPicPr>
+          <p:cNvPr id="3" name="Picture 2" descr="lasers_2_779x479.jpg"/>
+          <p:cNvPicPr>
+            <a:picLocks noChangeAspect="1"/>
+          </p:cNvPicPr>
+          <p:nvPr/>
+        </p:nvPicPr>
+        <p:blipFill>
+          <a:blip r:embed="rId2"/>
+          <a:stretch>
+            <a:fillRect/>
+          </a:stretch>
+        </p:blipFill>
+        <p:spPr>
+          <a:xfrm>
+            <a:off x="457200" y="1097280"/>
+            <a:ext cx="4114800" cy="2530153"/>
+          </a:xfrm>
+          <a:prstGeom prst="rect">
+            <a:avLst/>
+          </a:prstGeom>
+        </p:spPr>
+      </p:pic>
+      <p:pic>
+        <p:nvPicPr>
+          <p:cNvPr id="4" name="Picture 3" descr="na_kyuveta_1_10.png"/>
+          <p:cNvPicPr>
+            <a:picLocks noChangeAspect="1"/>
+          </p:cNvPicPr>
+          <p:nvPr/>
+        </p:nvPicPr>
+        <p:blipFill>
+          <a:blip r:embed="rId3"/>
+          <a:stretch>
+            <a:fillRect/>
+          </a:stretch>
+        </p:blipFill>
+        <p:spPr>
+          <a:xfrm>
+            <a:off x="5029200" y="1097280"/>
+            <a:ext cx="3657600" cy="2878397"/>
+          </a:xfrm>
+          <a:prstGeom prst="rect">
+            <a:avLst/>
+          </a:prstGeom>
+        </p:spPr>
+      </p:pic>
+      <p:sp>
+        <p:nvSpPr>
+          <p:cNvPr id="5" name="TextBox 4"/>
+          <p:cNvSpPr txBox="1"/>
+          <p:nvPr/>
+        </p:nvSpPr>
+        <p:spPr>
+          <a:xfrm>
+            <a:off x="457200" y="4572000"/>
+            <a:ext cx="4114800" cy="548640"/>
+          </a:xfrm>
+          <a:prstGeom prst="rect">
+            <a:avLst/>
+          </a:prstGeom>
+          <a:noFill/>
+        </p:spPr>
+        <p:txBody>
+          <a:bodyPr wrap="none">
+            <a:spAutoFit/>
+          </a:bodyPr>
+          <a:lstStyle/>
+          <a:p>
+            <a:pPr algn="ctr">
+              <a:defRPr sz="1400"/>
+            </a:pPr>
+            <a:r>
+              <a:t>Виброопора с маятниковым механизмом</a:t>
+            </a:r>
+          </a:p>
+        </p:txBody>
+      </p:sp>
+      <p:sp>
+        <p:nvSpPr>
+          <p:cNvPr id="6" name="TextBox 5"/>
+          <p:cNvSpPr txBox="1"/>
+          <p:nvPr/>
+        </p:nvSpPr>
+        <p:spPr>
+          <a:xfrm>
+            <a:off x="5029200" y="4572000"/>
+            <a:ext cx="3657600" cy="548640"/>
+          </a:xfrm>
+          <a:prstGeom prst="rect">
+            <a:avLst/>
+          </a:prstGeom>
+          <a:noFill/>
+        </p:spPr>
+        <p:txBody>
+          <a:bodyPr wrap="none">
+            <a:spAutoFit/>
+          </a:bodyPr>
+          <a:lstStyle/>
+          <a:p>
+            <a:pPr algn="ctr">
+              <a:defRPr sz="1400"/>
+            </a:pPr>
+            <a:r>
+              <a:t>Исследовательские кюветы в держателе</a:t>
+            </a:r>
+          </a:p>
+        </p:txBody>
+      </p:sp>
+    </p:spTree>
+  </p:cSld>
+  <p:clrMapOvr>
+    <a:masterClrMapping/>
+  </p:clrMapOvr>
+</p:sld>
+</file>
+
+<file path=ppt/slides/slide25.xml><?xml version="1.0" encoding="utf-8"?>
+<p:sld xmlns:a="http://schemas.openxmlformats.org/drawingml/2006/main" xmlns:p="http://schemas.openxmlformats.org/presentationml/2006/main" xmlns:r="http://schemas.openxmlformats.org/officeDocument/2006/relationships">
+  <p:cSld>
+    <p:spTree>
+      <p:nvGrpSpPr>
+        <p:cNvPr id="1" name=""/>
+        <p:cNvGrpSpPr/>
+        <p:nvPr/>
+      </p:nvGrpSpPr>
+      <p:grpSpPr/>
+      <p:sp>
+        <p:nvSpPr>
+          <p:cNvPr id="2" name="TextBox 1"/>
+          <p:cNvSpPr txBox="1"/>
+          <p:nvPr/>
+        </p:nvSpPr>
+        <p:spPr>
+          <a:xfrm>
+            <a:off x="457200" y="274320"/>
+            <a:ext cx="8229600" cy="731520"/>
+          </a:xfrm>
+          <a:prstGeom prst="rect">
+            <a:avLst/>
+          </a:prstGeom>
+          <a:noFill/>
+        </p:spPr>
+        <p:txBody>
+          <a:bodyPr wrap="none">
+            <a:spAutoFit/>
+          </a:bodyPr>
+          <a:lstStyle/>
+          <a:p>
+            <a:pPr>
+              <a:defRPr sz="2800" b="1">
+                <a:solidFill>
+                  <a:srgbClr val="003366"/>
+                </a:solidFill>
+              </a:defRPr>
+            </a:pPr>
+            <a:r>
+              <a:t>3.4. Программное обеспечение СУСД</a:t>
+            </a:r>
+          </a:p>
+        </p:txBody>
+      </p:sp>
+      <p:sp>
+        <p:nvSpPr>
+          <p:cNvPr id="3" name="TextBox 2"/>
+          <p:cNvSpPr txBox="1"/>
+          <p:nvPr/>
+        </p:nvSpPr>
+        <p:spPr>
+          <a:xfrm>
+            <a:off x="457200" y="1097280"/>
+            <a:ext cx="8229600" cy="5029200"/>
+          </a:xfrm>
+          <a:prstGeom prst="rect">
+            <a:avLst/>
+          </a:prstGeom>
+          <a:noFill/>
+        </p:spPr>
+        <p:txBody>
+          <a:bodyPr wrap="square">
+            <a:spAutoFit/>
+          </a:bodyPr>
+          <a:lstStyle/>
+          <a:p>
+            <a:pPr>
+              <a:spcAft>
+                <a:spcPts val="1000"/>
+              </a:spcAft>
+              <a:defRPr sz="1800"/>
+            </a:pPr>
+            <a:r>
+              <a:t>Архитектура:</a:t>
+            </a:r>
+          </a:p>
+          <a:p>
+            <a:pPr>
+              <a:spcAft>
+                <a:spcPts val="1000"/>
+              </a:spcAft>
+              <a:defRPr sz="1800"/>
+            </a:pPr>
+            <a:r>
+              <a:t>• Двухуровневая система: силовой модуль (нижний уровень) + компьютер с ПО (верхний уровень)</a:t>
+            </a:r>
+          </a:p>
+          <a:p>
+            <a:pPr>
+              <a:spcAft>
+                <a:spcPts val="1000"/>
+              </a:spcAft>
+              <a:defRPr sz="1800"/>
+            </a:pPr>
+          </a:p>
+          <a:p>
+            <a:pPr>
+              <a:spcAft>
+                <a:spcPts val="1000"/>
+              </a:spcAft>
+              <a:defRPr sz="1800"/>
+            </a:pPr>
+            <a:r>
+              <a:t>Функции ПО 643.САЦН.15900-01:</a:t>
+            </a:r>
+          </a:p>
+          <a:p>
+            <a:pPr>
+              <a:spcAft>
+                <a:spcPts val="1000"/>
+              </a:spcAft>
+              <a:defRPr sz="1800"/>
+            </a:pPr>
+            <a:r>
+              <a:t>• Интерфейс оператора на сенсорном мониторе FPM-7061T-R3AE</a:t>
+            </a:r>
+          </a:p>
+          <a:p>
+            <a:pPr>
+              <a:spcAft>
+                <a:spcPts val="1000"/>
+              </a:spcAft>
+              <a:defRPr sz="1800"/>
+            </a:pPr>
+            <a:r>
+              <a:t>• Автоматическое управление всеми узлами по циклограмме</a:t>
+            </a:r>
+          </a:p>
+          <a:p>
+            <a:pPr>
+              <a:spcAft>
+                <a:spcPts val="1000"/>
+              </a:spcAft>
+              <a:defRPr sz="1800"/>
+            </a:pPr>
+            <a:r>
+              <a:t>• Редактор циклограмм — графическое задание временной последовательности</a:t>
+            </a:r>
+          </a:p>
+          <a:p>
+            <a:pPr>
+              <a:spcAft>
+                <a:spcPts val="1000"/>
+              </a:spcAft>
+              <a:defRPr sz="1800"/>
+            </a:pPr>
+            <a:r>
+              <a:t>• Самотестирование — проверка работоспособности перед экспериментом</a:t>
+            </a:r>
+          </a:p>
+          <a:p>
+            <a:pPr>
+              <a:spcAft>
+                <a:spcPts val="1000"/>
+              </a:spcAft>
+              <a:defRPr sz="1800"/>
+            </a:pPr>
+            <a:r>
+              <a:t>• Сбор и хранение данных в базе результатов</a:t>
+            </a:r>
+          </a:p>
+          <a:p>
+            <a:pPr>
+              <a:spcAft>
+                <a:spcPts val="1000"/>
+              </a:spcAft>
+              <a:defRPr sz="1800"/>
+            </a:pPr>
+            <a:r>
+              <a:t>• Передача данных на Землю через бортовые системы МКС</a:t>
+            </a:r>
+          </a:p>
+          <a:p>
+            <a:pPr>
+              <a:spcAft>
+                <a:spcPts val="1000"/>
+              </a:spcAft>
+              <a:defRPr sz="1800"/>
+            </a:pPr>
+          </a:p>
+          <a:p>
+            <a:pPr>
+              <a:spcAft>
+                <a:spcPts val="1000"/>
+              </a:spcAft>
+              <a:defRPr sz="1800"/>
+            </a:pPr>
+            <a:r>
+              <a:t>Возможности редактора циклограмм:</a:t>
+            </a:r>
+          </a:p>
+          <a:p>
+            <a:pPr>
+              <a:spcAft>
+                <a:spcPts val="1000"/>
+              </a:spcAft>
+              <a:defRPr sz="1800"/>
+            </a:pPr>
+            <a:r>
+              <a:t>• Задание времени включения каждого узла</a:t>
+            </a:r>
+          </a:p>
+          <a:p>
+            <a:pPr>
+              <a:spcAft>
+                <a:spcPts val="1000"/>
+              </a:spcAft>
+              <a:defRPr sz="1800"/>
+            </a:pPr>
+            <a:r>
+              <a:t>• Настройка параметров: температура, вибрация, поля</a:t>
+            </a:r>
+          </a:p>
+          <a:p>
+            <a:pPr>
+              <a:spcAft>
+                <a:spcPts val="1000"/>
+              </a:spcAft>
+              <a:defRPr sz="1800"/>
+            </a:pPr>
+            <a:r>
+              <a:t>• Предпросмотр циклограммы перед запуском</a:t>
+            </a:r>
+          </a:p>
+          <a:p>
+            <a:pPr>
+              <a:spcAft>
+                <a:spcPts val="1000"/>
+              </a:spcAft>
+              <a:defRPr sz="1800"/>
+            </a:pPr>
+            <a:r>
+              <a:t>• Сохранение и загрузка шаблонов</a:t>
+            </a:r>
+          </a:p>
+        </p:txBody>
+      </p:sp>
+    </p:spTree>
+  </p:cSld>
+  <p:clrMapOvr>
+    <a:masterClrMapping/>
+  </p:clrMapOvr>
+</p:sld>
+</file>
+
+<file path=ppt/slides/slide26.xml><?xml version="1.0" encoding="utf-8"?>
+<p:sld xmlns:a="http://schemas.openxmlformats.org/drawingml/2006/main" xmlns:p="http://schemas.openxmlformats.org/presentationml/2006/main" xmlns:r="http://schemas.openxmlformats.org/officeDocument/2006/relationships">
+  <p:cSld>
+    <p:spTree>
+      <p:nvGrpSpPr>
+        <p:cNvPr id="1" name=""/>
+        <p:cNvGrpSpPr/>
+        <p:nvPr/>
+      </p:nvGrpSpPr>
+      <p:grpSpPr/>
+      <p:sp>
+        <p:nvSpPr>
+          <p:cNvPr id="2" name="TextBox 1"/>
+          <p:cNvSpPr txBox="1"/>
+          <p:nvPr/>
+        </p:nvSpPr>
+        <p:spPr>
+          <a:xfrm>
+            <a:off x="457200" y="274320"/>
+            <a:ext cx="8229600" cy="731520"/>
+          </a:xfrm>
+          <a:prstGeom prst="rect">
+            <a:avLst/>
+          </a:prstGeom>
+          <a:noFill/>
+        </p:spPr>
+        <p:txBody>
+          <a:bodyPr wrap="none">
+            <a:spAutoFit/>
+          </a:bodyPr>
+          <a:lstStyle/>
+          <a:p>
+            <a:pPr>
+              <a:defRPr sz="2800" b="1">
+                <a:solidFill>
+                  <a:srgbClr val="003366"/>
+                </a:solidFill>
+              </a:defRPr>
+            </a:pPr>
+            <a:r>
+              <a:t>4.2. Детали полученных результатов</a:t>
+            </a:r>
+          </a:p>
+        </p:txBody>
+      </p:sp>
+      <p:sp>
+        <p:nvSpPr>
+          <p:cNvPr id="3" name="TextBox 2"/>
+          <p:cNvSpPr txBox="1"/>
+          <p:nvPr/>
+        </p:nvSpPr>
+        <p:spPr>
+          <a:xfrm>
+            <a:off x="457200" y="1097280"/>
+            <a:ext cx="4114800" cy="5029200"/>
+          </a:xfrm>
+          <a:prstGeom prst="rect">
+            <a:avLst/>
+          </a:prstGeom>
+          <a:noFill/>
+        </p:spPr>
+        <p:txBody>
+          <a:bodyPr wrap="square">
+            <a:spAutoFit/>
+          </a:bodyPr>
+          <a:lstStyle/>
+          <a:p>
+            <a:pPr>
+              <a:spcAft>
+                <a:spcPts val="1000"/>
+              </a:spcAft>
+              <a:defRPr sz="1700"/>
+            </a:pPr>
+            <a:r>
+              <a:t>Полимерные системы (кюветы 1–6):</a:t>
+            </a:r>
+          </a:p>
+          <a:p>
+            <a:pPr>
+              <a:spcAft>
+                <a:spcPts val="1000"/>
+              </a:spcAft>
+              <a:defRPr sz="1700"/>
+            </a:pPr>
+            <a:r>
+              <a:t>• Впервые зафиксировано отделение полимерной плёнки в невесомости</a:t>
+            </a:r>
+          </a:p>
+          <a:p>
+            <a:pPr>
+              <a:spcAft>
+                <a:spcPts val="1000"/>
+              </a:spcAft>
+              <a:defRPr sz="1700"/>
+            </a:pPr>
+            <a:r>
+              <a:t>• Изучена кинетика расслоения ПВП, ПВМЭ</a:t>
+            </a:r>
+          </a:p>
+          <a:p>
+            <a:pPr>
+              <a:spcAft>
+                <a:spcPts val="1000"/>
+              </a:spcAft>
+              <a:defRPr sz="1700"/>
+            </a:pPr>
+          </a:p>
+          <a:p>
+            <a:pPr>
+              <a:spcAft>
+                <a:spcPts val="1000"/>
+              </a:spcAft>
+              <a:defRPr sz="1700"/>
+            </a:pPr>
+            <a:r>
+              <a:t>Суспензии (кюветы 7–18):</a:t>
+            </a:r>
+          </a:p>
+          <a:p>
+            <a:pPr>
+              <a:spcAft>
+                <a:spcPts val="1000"/>
+              </a:spcAft>
+              <a:defRPr sz="1700"/>
+            </a:pPr>
+            <a:r>
+              <a:t>• Полистирол 0,5 и 10 мкм — формирование структур</a:t>
+            </a:r>
+          </a:p>
+          <a:p>
+            <a:pPr>
+              <a:spcAft>
+                <a:spcPts val="1000"/>
+              </a:spcAft>
+              <a:defRPr sz="1700"/>
+            </a:pPr>
+            <a:r>
+              <a:t>• Стеклосферы — виброиндуцированное смешение</a:t>
+            </a:r>
+          </a:p>
+          <a:p>
+            <a:pPr>
+              <a:spcAft>
+                <a:spcPts val="1000"/>
+              </a:spcAft>
+              <a:defRPr sz="1700"/>
+            </a:pPr>
+            <a:r>
+              <a:t>• Фуллеренсодержащая сажа — агрегация наночастиц</a:t>
+            </a:r>
+          </a:p>
+          <a:p>
+            <a:pPr>
+              <a:spcAft>
+                <a:spcPts val="1000"/>
+              </a:spcAft>
+              <a:defRPr sz="1700"/>
+            </a:pPr>
+            <a:r>
+              <a:t>• Глобулярный углерод — поведение в воде</a:t>
+            </a:r>
+          </a:p>
+        </p:txBody>
+      </p:sp>
+      <p:sp>
+        <p:nvSpPr>
+          <p:cNvPr id="4" name="TextBox 3"/>
+          <p:cNvSpPr txBox="1"/>
+          <p:nvPr/>
+        </p:nvSpPr>
+        <p:spPr>
+          <a:xfrm>
+            <a:off x="4754880" y="1097280"/>
+            <a:ext cx="4114800" cy="5029200"/>
+          </a:xfrm>
+          <a:prstGeom prst="rect">
+            <a:avLst/>
+          </a:prstGeom>
+          <a:noFill/>
+        </p:spPr>
+        <p:txBody>
+          <a:bodyPr wrap="square">
+            <a:spAutoFit/>
+          </a:bodyPr>
+          <a:lstStyle/>
+          <a:p>
+            <a:pPr>
+              <a:spcAft>
+                <a:spcPts val="1000"/>
+              </a:spcAft>
+              <a:defRPr sz="1700"/>
+            </a:pPr>
+            <a:r>
+              <a:t>Электро- и магнитореологические жидкости (кюветы 19–20):</a:t>
+            </a:r>
+          </a:p>
+          <a:p>
+            <a:pPr>
+              <a:spcAft>
+                <a:spcPts val="1000"/>
+              </a:spcAft>
+              <a:defRPr sz="1700"/>
+            </a:pPr>
+            <a:r>
+              <a:t>• Магнетит — манипуляция магнитным полем</a:t>
+            </a:r>
+          </a:p>
+          <a:p>
+            <a:pPr>
+              <a:spcAft>
+                <a:spcPts val="1000"/>
+              </a:spcAft>
+              <a:defRPr sz="1700"/>
+            </a:pPr>
+            <a:r>
+              <a:t>• Частицы выстраиваются в цепочки</a:t>
+            </a:r>
+          </a:p>
+          <a:p>
+            <a:pPr>
+              <a:spcAft>
+                <a:spcPts val="1000"/>
+              </a:spcAft>
+              <a:defRPr sz="1700"/>
+            </a:pPr>
+            <a:r>
+              <a:t>• При выключении поля — «разбегание»</a:t>
+            </a:r>
+          </a:p>
+          <a:p>
+            <a:pPr>
+              <a:spcAft>
+                <a:spcPts val="1000"/>
+              </a:spcAft>
+              <a:defRPr sz="1700"/>
+            </a:pPr>
+          </a:p>
+          <a:p>
+            <a:pPr>
+              <a:spcAft>
+                <a:spcPts val="1000"/>
+              </a:spcAft>
+              <a:defRPr sz="1700"/>
+            </a:pPr>
+            <a:r>
+              <a:t>Уникальность:</a:t>
+            </a:r>
+          </a:p>
+          <a:p>
+            <a:pPr>
+              <a:spcAft>
+                <a:spcPts val="1000"/>
+              </a:spcAft>
+              <a:defRPr sz="1700"/>
+            </a:pPr>
+            <a:r>
+              <a:t>• Постоянная микрогравитация (не 20–30 сек)</a:t>
+            </a:r>
+          </a:p>
+          <a:p>
+            <a:pPr>
+              <a:spcAft>
+                <a:spcPts val="1000"/>
+              </a:spcAft>
+              <a:defRPr sz="1700"/>
+            </a:pPr>
+            <a:r>
+              <a:t>• Комбинированное воздействие</a:t>
+            </a:r>
+          </a:p>
+          <a:p>
+            <a:pPr>
+              <a:spcAft>
+                <a:spcPts val="1000"/>
+              </a:spcAft>
+              <a:defRPr sz="1700"/>
+            </a:pPr>
+            <a:r>
+              <a:t>• Синхронная регистрация лазерной дифракции и видео</a:t>
+            </a:r>
+          </a:p>
+        </p:txBody>
+      </p:sp>
+    </p:spTree>
+  </p:cSld>
+  <p:clrMapOvr>
+    <a:masterClrMapping/>
+  </p:clrMapOvr>
+</p:sld>
+</file>
+
+<file path=ppt/slides/slide27.xml><?xml version="1.0" encoding="utf-8"?>
+<p:sld xmlns:a="http://schemas.openxmlformats.org/drawingml/2006/main" xmlns:p="http://schemas.openxmlformats.org/presentationml/2006/main" xmlns:r="http://schemas.openxmlformats.org/officeDocument/2006/relationships">
+  <p:cSld>
+    <p:spTree>
+      <p:nvGrpSpPr>
+        <p:cNvPr id="1" name=""/>
+        <p:cNvGrpSpPr/>
+        <p:nvPr/>
+      </p:nvGrpSpPr>
+      <p:grpSpPr/>
+      <p:sp>
+        <p:nvSpPr>
+          <p:cNvPr id="2" name="TextBox 1"/>
+          <p:cNvSpPr txBox="1"/>
+          <p:nvPr/>
+        </p:nvSpPr>
+        <p:spPr>
+          <a:xfrm>
+            <a:off x="457200" y="274320"/>
+            <a:ext cx="8229600" cy="731520"/>
+          </a:xfrm>
+          <a:prstGeom prst="rect">
+            <a:avLst/>
+          </a:prstGeom>
+          <a:noFill/>
+        </p:spPr>
+        <p:txBody>
+          <a:bodyPr wrap="none">
+            <a:spAutoFit/>
+          </a:bodyPr>
+          <a:lstStyle/>
+          <a:p>
+            <a:pPr>
+              <a:defRPr sz="2800" b="1">
+                <a:solidFill>
+                  <a:srgbClr val="003366"/>
+                </a:solidFill>
+              </a:defRPr>
+            </a:pPr>
+            <a:r>
+              <a:t>4.3. Прикладное значение — плакат проекта</a:t>
+            </a:r>
+          </a:p>
+        </p:txBody>
+      </p:sp>
+      <p:pic>
+        <p:nvPicPr>
+          <p:cNvPr id="3" name="Picture 2" descr="image.jpg"/>
+          <p:cNvPicPr>
+            <a:picLocks noChangeAspect="1"/>
+          </p:cNvPicPr>
+          <p:nvPr/>
+        </p:nvPicPr>
+        <p:blipFill>
+          <a:blip r:embed="rId2"/>
+          <a:stretch>
+            <a:fillRect/>
+          </a:stretch>
+        </p:blipFill>
+        <p:spPr>
+          <a:xfrm>
+            <a:off x="457200" y="1097280"/>
+            <a:ext cx="8229600" cy="4446164"/>
+          </a:xfrm>
+          <a:prstGeom prst="rect">
+            <a:avLst/>
+          </a:prstGeom>
+        </p:spPr>
+      </p:pic>
+    </p:spTree>
+  </p:cSld>
+  <p:clrMapOvr>
+    <a:masterClrMapping/>
+  </p:clrMapOvr>
+</p:sld>
+</file>
+
+<file path=ppt/slides/slide28.xml><?xml version="1.0" encoding="utf-8"?>
+<p:sld xmlns:a="http://schemas.openxmlformats.org/drawingml/2006/main" xmlns:p="http://schemas.openxmlformats.org/presentationml/2006/main" xmlns:r="http://schemas.openxmlformats.org/officeDocument/2006/relationships">
+  <p:cSld>
+    <p:spTree>
+      <p:nvGrpSpPr>
+        <p:cNvPr id="1" name=""/>
+        <p:cNvGrpSpPr/>
+        <p:nvPr/>
+      </p:nvGrpSpPr>
+      <p:grpSpPr/>
+      <p:sp>
+        <p:nvSpPr>
+          <p:cNvPr id="2" name="TextBox 1"/>
+          <p:cNvSpPr txBox="1"/>
+          <p:nvPr/>
+        </p:nvSpPr>
+        <p:spPr>
+          <a:xfrm>
+            <a:off x="457200" y="274320"/>
+            <a:ext cx="8229600" cy="731520"/>
+          </a:xfrm>
+          <a:prstGeom prst="rect">
+            <a:avLst/>
+          </a:prstGeom>
+          <a:noFill/>
+        </p:spPr>
+        <p:txBody>
+          <a:bodyPr wrap="none">
+            <a:spAutoFit/>
+          </a:bodyPr>
+          <a:lstStyle/>
+          <a:p>
+            <a:pPr>
+              <a:defRPr sz="2800" b="1">
+                <a:solidFill>
+                  <a:srgbClr val="003366"/>
+                </a:solidFill>
+              </a:defRPr>
+            </a:pPr>
+            <a:r>
+              <a:t>4.4. Расширенное прикладное значение</a:t>
+            </a:r>
+          </a:p>
+        </p:txBody>
+      </p:sp>
+      <p:sp>
+        <p:nvSpPr>
+          <p:cNvPr id="3" name="TextBox 2"/>
+          <p:cNvSpPr txBox="1"/>
+          <p:nvPr/>
+        </p:nvSpPr>
+        <p:spPr>
+          <a:xfrm>
+            <a:off x="457200" y="1097280"/>
+            <a:ext cx="4114800" cy="5029200"/>
+          </a:xfrm>
+          <a:prstGeom prst="rect">
+            <a:avLst/>
+          </a:prstGeom>
+          <a:noFill/>
+        </p:spPr>
+        <p:txBody>
+          <a:bodyPr wrap="square">
+            <a:spAutoFit/>
+          </a:bodyPr>
+          <a:lstStyle/>
+          <a:p>
+            <a:pPr>
+              <a:spcAft>
+                <a:spcPts val="1000"/>
+              </a:spcAft>
+              <a:defRPr sz="1800"/>
+            </a:pPr>
+            <a:r>
+              <a:t>Материалы для лунных баз:</a:t>
+            </a:r>
+          </a:p>
+          <a:p>
+            <a:pPr>
+              <a:spcAft>
+                <a:spcPts val="1000"/>
+              </a:spcAft>
+              <a:defRPr sz="1800"/>
+            </a:pPr>
+            <a:r>
+              <a:t>• 3D-печать из лунного грунта (реголита)</a:t>
+            </a:r>
+          </a:p>
+          <a:p>
+            <a:pPr>
+              <a:spcAft>
+                <a:spcPts val="1000"/>
+              </a:spcAft>
+              <a:defRPr sz="1800"/>
+            </a:pPr>
+            <a:r>
+              <a:t>• Полимерные связующие для строительства</a:t>
+            </a:r>
+          </a:p>
+          <a:p>
+            <a:pPr>
+              <a:spcAft>
+                <a:spcPts val="1000"/>
+              </a:spcAft>
+              <a:defRPr sz="1800"/>
+            </a:pPr>
+            <a:r>
+              <a:t>• Экономия на доставке материалов с Земли</a:t>
+            </a:r>
+          </a:p>
+          <a:p>
+            <a:pPr>
+              <a:spcAft>
+                <a:spcPts val="1000"/>
+              </a:spcAft>
+              <a:defRPr sz="1800"/>
+            </a:pPr>
+          </a:p>
+          <a:p>
+            <a:pPr>
+              <a:spcAft>
+                <a:spcPts val="1000"/>
+              </a:spcAft>
+              <a:defRPr sz="1800"/>
+            </a:pPr>
+            <a:r>
+              <a:t>«Умные» материалы:</a:t>
+            </a:r>
+          </a:p>
+          <a:p>
+            <a:pPr>
+              <a:spcAft>
+                <a:spcPts val="1000"/>
+              </a:spcAft>
+              <a:defRPr sz="1800"/>
+            </a:pPr>
+            <a:r>
+              <a:t>• Амортизаторы с изменяемой жёсткостью</a:t>
+            </a:r>
+          </a:p>
+          <a:p>
+            <a:pPr>
+              <a:spcAft>
+                <a:spcPts val="1000"/>
+              </a:spcAft>
+              <a:defRPr sz="1800"/>
+            </a:pPr>
+            <a:r>
+              <a:t>• Протезы и экзоскелеты</a:t>
+            </a:r>
+          </a:p>
+          <a:p>
+            <a:pPr>
+              <a:spcAft>
+                <a:spcPts val="1000"/>
+              </a:spcAft>
+              <a:defRPr sz="1800"/>
+            </a:pPr>
+            <a:r>
+              <a:t>• Робототехника (мягкие захваты)</a:t>
+            </a:r>
+          </a:p>
+          <a:p>
+            <a:pPr>
+              <a:spcAft>
+                <a:spcPts val="1000"/>
+              </a:spcAft>
+              <a:defRPr sz="1800"/>
+            </a:pPr>
+            <a:r>
+              <a:t>• Космические демпферы</a:t>
+            </a:r>
+          </a:p>
+        </p:txBody>
+      </p:sp>
+      <p:sp>
+        <p:nvSpPr>
+          <p:cNvPr id="4" name="TextBox 3"/>
+          <p:cNvSpPr txBox="1"/>
+          <p:nvPr/>
+        </p:nvSpPr>
+        <p:spPr>
+          <a:xfrm>
+            <a:off x="4754880" y="1097280"/>
+            <a:ext cx="4114800" cy="5029200"/>
+          </a:xfrm>
+          <a:prstGeom prst="rect">
+            <a:avLst/>
+          </a:prstGeom>
+          <a:noFill/>
+        </p:spPr>
+        <p:txBody>
+          <a:bodyPr wrap="square">
+            <a:spAutoFit/>
+          </a:bodyPr>
+          <a:lstStyle/>
+          <a:p>
+            <a:pPr>
+              <a:spcAft>
+                <a:spcPts val="1000"/>
+              </a:spcAft>
+              <a:defRPr sz="1800"/>
+            </a:pPr>
+            <a:r>
+              <a:t>Фармацевтика:</a:t>
+            </a:r>
+          </a:p>
+          <a:p>
+            <a:pPr>
+              <a:spcAft>
+                <a:spcPts val="1000"/>
+              </a:spcAft>
+              <a:defRPr sz="1800"/>
+            </a:pPr>
+            <a:r>
+              <a:t>• Суспензии и эмульсии с контролируемым высвобождением</a:t>
+            </a:r>
+          </a:p>
+          <a:p>
+            <a:pPr>
+              <a:spcAft>
+                <a:spcPts val="1000"/>
+              </a:spcAft>
+              <a:defRPr sz="1800"/>
+            </a:pPr>
+            <a:r>
+              <a:t>• Смеси для таблетирования</a:t>
+            </a:r>
+          </a:p>
+          <a:p>
+            <a:pPr>
+              <a:spcAft>
+                <a:spcPts val="1000"/>
+              </a:spcAft>
+              <a:defRPr sz="1800"/>
+            </a:pPr>
+            <a:r>
+              <a:t>• Стоматологические композиты</a:t>
+            </a:r>
+          </a:p>
+          <a:p>
+            <a:pPr>
+              <a:spcAft>
+                <a:spcPts val="1000"/>
+              </a:spcAft>
+              <a:defRPr sz="1800"/>
+            </a:pPr>
+          </a:p>
+          <a:p>
+            <a:pPr>
+              <a:spcAft>
+                <a:spcPts val="1000"/>
+              </a:spcAft>
+              <a:defRPr sz="1800"/>
+            </a:pPr>
+            <a:r>
+              <a:t>Образование:</a:t>
+            </a:r>
+          </a:p>
+          <a:p>
+            <a:pPr>
+              <a:spcAft>
+                <a:spcPts val="1000"/>
+              </a:spcAft>
+              <a:defRPr sz="1800"/>
+            </a:pPr>
+            <a:r>
+              <a:t>• Учебные дисциплины в МАИ, МФТИ</a:t>
+            </a:r>
+          </a:p>
+          <a:p>
+            <a:pPr>
+              <a:spcAft>
+                <a:spcPts val="1000"/>
+              </a:spcAft>
+              <a:defRPr sz="1800"/>
+            </a:pPr>
+            <a:r>
+              <a:t>• Практикум по физической химии</a:t>
+            </a:r>
+          </a:p>
+          <a:p>
+            <a:pPr>
+              <a:spcAft>
+                <a:spcPts val="1000"/>
+              </a:spcAft>
+              <a:defRPr sz="1800"/>
+            </a:pPr>
+            <a:r>
+              <a:t>• Популяризация космических исследований</a:t>
+            </a:r>
+          </a:p>
+          <a:p>
+            <a:pPr>
+              <a:spcAft>
+                <a:spcPts val="1000"/>
+              </a:spcAft>
+              <a:defRPr sz="1800"/>
+            </a:pPr>
+          </a:p>
+          <a:p>
+            <a:pPr>
+              <a:spcAft>
+                <a:spcPts val="1000"/>
+              </a:spcAft>
+              <a:defRPr sz="1800"/>
+            </a:pPr>
+            <a:r>
+              <a:t>Промышленность:</a:t>
+            </a:r>
+          </a:p>
+          <a:p>
+            <a:pPr>
+              <a:spcAft>
+                <a:spcPts val="1000"/>
+              </a:spcAft>
+              <a:defRPr sz="1800"/>
+            </a:pPr>
+            <a:r>
+              <a:t>• Строительные элементы повышенной прочности</a:t>
+            </a:r>
+          </a:p>
+          <a:p>
+            <a:pPr>
+              <a:spcAft>
+                <a:spcPts val="1000"/>
+              </a:spcAft>
+              <a:defRPr sz="1800"/>
+            </a:pPr>
+            <a:r>
+              <a:t>• Порошковая металлургия</a:t>
+            </a:r>
+          </a:p>
+          <a:p>
+            <a:pPr>
+              <a:spcAft>
+                <a:spcPts val="1000"/>
+              </a:spcAft>
+              <a:defRPr sz="1800"/>
+            </a:pPr>
+            <a:r>
+              <a:t>• Высоконаполненные полимерные композиты</a:t>
+            </a:r>
+          </a:p>
+        </p:txBody>
+      </p:sp>
+    </p:spTree>
+  </p:cSld>
+  <p:clrMapOvr>
+    <a:masterClrMapping/>
+  </p:clrMapOvr>
+</p:sld>
+</file>
+
+<file path=ppt/slides/slide29.xml><?xml version="1.0" encoding="utf-8"?>
+<p:sld xmlns:a="http://schemas.openxmlformats.org/drawingml/2006/main" xmlns:p="http://schemas.openxmlformats.org/presentationml/2006/main" xmlns:r="http://schemas.openxmlformats.org/officeDocument/2006/relationships">
+  <p:cSld>
+    <p:spTree>
+      <p:nvGrpSpPr>
+        <p:cNvPr id="1" name=""/>
+        <p:cNvGrpSpPr/>
+        <p:nvPr/>
+      </p:nvGrpSpPr>
+      <p:grpSpPr/>
+      <p:sp>
+        <p:nvSpPr>
+          <p:cNvPr id="2" name="TextBox 1"/>
+          <p:cNvSpPr txBox="1"/>
+          <p:nvPr/>
+        </p:nvSpPr>
+        <p:spPr>
+          <a:xfrm>
+            <a:off x="457200" y="274320"/>
+            <a:ext cx="8229600" cy="731520"/>
+          </a:xfrm>
+          <a:prstGeom prst="rect">
+            <a:avLst/>
+          </a:prstGeom>
+          <a:noFill/>
+        </p:spPr>
+        <p:txBody>
+          <a:bodyPr wrap="none">
+            <a:spAutoFit/>
+          </a:bodyPr>
+          <a:lstStyle/>
+          <a:p>
+            <a:pPr>
+              <a:defRPr sz="3200" b="1">
+                <a:solidFill>
+                  <a:srgbClr val="003366"/>
+                </a:solidFill>
+              </a:defRPr>
+            </a:pPr>
+            <a:r>
+              <a:t>Заключение</a:t>
+            </a:r>
+          </a:p>
+        </p:txBody>
+      </p:sp>
+      <p:sp>
+        <p:nvSpPr>
+          <p:cNvPr id="3" name="TextBox 2"/>
+          <p:cNvSpPr txBox="1"/>
+          <p:nvPr/>
+        </p:nvSpPr>
+        <p:spPr>
+          <a:xfrm>
+            <a:off x="457200" y="1188720"/>
+            <a:ext cx="8229600" cy="5029200"/>
+          </a:xfrm>
+          <a:prstGeom prst="rect">
+            <a:avLst/>
+          </a:prstGeom>
+          <a:noFill/>
+        </p:spPr>
+        <p:txBody>
+          <a:bodyPr wrap="square">
+            <a:spAutoFit/>
+          </a:bodyPr>
+          <a:lstStyle/>
+          <a:p>
+            <a:pPr>
+              <a:spcAft>
+                <a:spcPts val="1200"/>
+              </a:spcAft>
+              <a:defRPr sz="2000"/>
+            </a:pPr>
+            <a:r>
+              <a:t>Проект АО «Лазерные системы» по созданию НА «Дисперсия» — успешный пример разработки высокотехнологичного космического прибора.</a:t>
+            </a:r>
+          </a:p>
+          <a:p>
+            <a:pPr>
+              <a:spcAft>
+                <a:spcPts val="1200"/>
+              </a:spcAft>
+              <a:defRPr sz="2000"/>
+            </a:pPr>
+          </a:p>
+          <a:p>
+            <a:pPr>
+              <a:spcAft>
+                <a:spcPts val="1200"/>
+              </a:spcAft>
+              <a:defRPr sz="2000"/>
+            </a:pPr>
+            <a:r>
+              <a:t>• Создан прибор, способный работать в жёстких условиях космического полёта</a:t>
+            </a:r>
+          </a:p>
+          <a:p>
+            <a:pPr>
+              <a:spcAft>
+                <a:spcPts val="1200"/>
+              </a:spcAft>
+              <a:defRPr sz="2000"/>
+            </a:pPr>
+            <a:r>
+              <a:t>• Успешно пройдены все наземные испытания (вибрация, удары, температурные циклы, радиация)</a:t>
+            </a:r>
+          </a:p>
+          <a:p>
+            <a:pPr>
+              <a:spcAft>
+                <a:spcPts val="1200"/>
+              </a:spcAft>
+              <a:defRPr sz="2000"/>
+            </a:pPr>
+            <a:r>
+              <a:t>• 20 сеансов на МКС проведены космонавтом Дмитрием Петелиным</a:t>
+            </a:r>
+          </a:p>
+          <a:p>
+            <a:pPr>
+              <a:spcAft>
+                <a:spcPts val="1200"/>
+              </a:spcAft>
+              <a:defRPr sz="2000"/>
+            </a:pPr>
+            <a:r>
+              <a:t>• Получен массив уникальных данных о поведении дисперсных систем в микрогравитации</a:t>
+            </a:r>
+          </a:p>
+          <a:p>
+            <a:pPr>
+              <a:spcAft>
+                <a:spcPts val="1200"/>
+              </a:spcAft>
+              <a:defRPr sz="2000"/>
+            </a:pPr>
+            <a:r>
+              <a:t>• Заложена основа для новых экспериментов: «Микс-Реголит» (60 кювет), «Пыль-УФ», «Кулон-магнит»</a:t>
+            </a:r>
+          </a:p>
+          <a:p>
+            <a:pPr>
+              <a:spcAft>
+                <a:spcPts val="1200"/>
+              </a:spcAft>
+              <a:defRPr sz="2000"/>
+            </a:pPr>
+            <a:r>
+              <a:t>• Полная импортозамещённость компонентов и ПО</a:t>
+            </a:r>
+          </a:p>
+          <a:p>
+            <a:pPr>
+              <a:spcAft>
+                <a:spcPts val="1200"/>
+              </a:spcAft>
+              <a:defRPr sz="2000"/>
+            </a:pPr>
+            <a:r>
+              <a:t>• Результаты востребованы для программы освоения Луны, разработки интеллектуальных материалов и развития космического приборостроения</a:t>
+            </a:r>
+          </a:p>
+          <a:p>
+            <a:pPr>
+              <a:spcAft>
+                <a:spcPts val="1200"/>
+              </a:spcAft>
+              <a:defRPr sz="2000"/>
+            </a:pPr>
+          </a:p>
+          <a:p>
+            <a:pPr>
+              <a:spcAft>
+                <a:spcPts val="1200"/>
+              </a:spcAft>
+              <a:defRPr sz="2000"/>
+            </a:pPr>
+            <a:r>
+              <a:t>АО «Лазерные системы» доказало, что может создавать сложные космические приборы — от идеи до реализации.</a:t>
+            </a:r>
+          </a:p>
+          <a:p>
+            <a:pPr>
+              <a:spcAft>
+                <a:spcPts val="1200"/>
+              </a:spcAft>
+              <a:defRPr sz="2000"/>
+            </a:pPr>
+          </a:p>
+          <a:p>
+            <a:pPr>
+              <a:spcAft>
+                <a:spcPts val="1200"/>
+              </a:spcAft>
+              <a:defRPr sz="2000"/>
+            </a:pPr>
+            <a:r>
+              <a:t>Доклад окончен. Спасибо за внимание!</a:t>
             </a:r>
           </a:p>
         </p:txBody>
